--- a/viewers/pptx/e2e/fixtures/ribbon-galleries.pptx
+++ b/viewers/pptx/e2e/fixtures/ribbon-galleries.pptx
@@ -601,21 +601,21 @@
                 <a:gridCol w="3048000">
                   <a:extLst>
                     <a:ext uri="{9D8B030D-6E8A-4147-A177-3AD203B41FA5}">
-                      <a16:colId val="3566221863"/>
+                      <a16:colId val="2183158729"/>
                     </a:ext>
                   </a:extLst>
                 </a:gridCol>
                 <a:gridCol w="3048000">
                   <a:extLst>
                     <a:ext uri="{9D8B030D-6E8A-4147-A177-3AD203B41FA5}">
-                      <a16:colId val="4071271386"/>
+                      <a16:colId val="3069516443"/>
                     </a:ext>
                   </a:extLst>
                 </a:gridCol>
                 <a:gridCol w="3048000">
                   <a:extLst>
                     <a:ext uri="{9D8B030D-6E8A-4147-A177-3AD203B41FA5}">
-                      <a16:colId val="257111845"/>
+                      <a16:colId val="1807663294"/>
                     </a:ext>
                   </a:extLst>
                 </a:gridCol>
